--- a/smoke_samples/07_tables.pptx
+++ b/smoke_samples/07_tables.pptx
@@ -229,7 +229,7 @@
         <p:spPr>
           <a:xfrm>
             <a:off x="457200" y="274638"/>
-            <a:ext cx="8230200" cy="1143000"/>
+            <a:ext cx="8229600" cy="1143000"/>
           </a:xfrm>
           <a:prstGeom prst="rect">
             <a:avLst/>
@@ -242,7 +242,7 @@
           <a:p>
             <a:pPr algn="l"/>
             <a:r>
-              <a:rPr lang="en-US" sz="4400" b="1" i="0" dirty="0"/>
+              <a:rPr lang="en-US" sz="4400" b="0" i="0" u="none" dirty="0"/>
               <a:t>Tables</a:t>
             </a:r>
           </a:p>

--- a/smoke_samples/07_tables.pptx
+++ b/smoke_samples/07_tables.pptx
@@ -201,11 +201,6 @@
 <file path=ppt/slides/slide1.xml><?xml version="1.0" encoding="utf-8"?>
 <p:sld xmlns:a="http://schemas.openxmlformats.org/drawingml/2006/main" xmlns:c="http://schemas.openxmlformats.org/drawingml/2006/chart" xmlns:r="http://schemas.openxmlformats.org/officeDocument/2006/relationships" xmlns:p="http://schemas.openxmlformats.org/presentationml/2006/main">
   <p:cSld>
-    <p:bg>
-      <p:bgRef idx="1001">
-        <a:schemeClr val="bg1"/>
-      </p:bgRef>
-    </p:bg>
     <p:spTree>
       <p:nvGrpSpPr>
         <p:cNvPr id="1" name=""/>
@@ -407,9 +402,9 @@
 </file>
 
 <file path=ppt/theme/theme1.xml><?xml version="1.0" encoding="utf-8"?>
-<a:theme xmlns:a="http://schemas.openxmlformats.org/drawingml/2006/main" name="Office Theme">
+<a:theme xmlns:a="http://schemas.openxmlformats.org/drawingml/2006/main" name="Office Theme marketing">
   <a:themeElements>
-    <a:clrScheme name="Office">
+    <a:clrScheme name="Office colors">
       <a:dk1>
         <a:sysClr val="windowText" lastClr="000000"/>
       </a:dk1>
@@ -447,7 +442,7 @@
         <a:srgbClr val="800080"/>
       </a:folHlink>
     </a:clrScheme>
-    <a:fontScheme name="Office">
+    <a:fontScheme name="Office fonts">
       <a:majorFont>
         <a:latin typeface="Calibri"/>
         <a:ea typeface=""/>

--- a/smoke_samples/07_tables.pptx
+++ b/smoke_samples/07_tables.pptx
@@ -262,9 +262,9 @@
                 <a:tableStyleId>{5C22544A-7EE6-4342-B048-85BDC9FD1C3A}</a:tableStyleId>
               </a:tblPr>
               <a:tblGrid>
-                <a:gridCol w="2000000"/>
-                <a:gridCol w="2000000"/>
-                <a:gridCol w="2000000"/>
+                <a:gridCol w="1828800"/>
+                <a:gridCol w="1828800"/>
+                <a:gridCol w="1828800"/>
               </a:tblGrid>
               <a:tr h="1066800">
                 <a:tc>
